--- a/愛是.pptx
+++ b/愛是.pptx
@@ -112,6 +112,11 @@
       </a:defRPr>
     </a:lvl9pPr>
   </p:defaultTextStyle>
+  <p:extLst>
+    <p:ext uri="{EFAFB233-063F-42B5-8137-9DF3F51BA10A}">
+      <p15:sldGuideLst xmlns:p15="http://schemas.microsoft.com/office/powerpoint/2012/main"/>
+    </p:ext>
+  </p:extLst>
 </p:presentation>
 </file>
 
@@ -153,7 +158,7 @@
           <a:lstStyle/>
           <a:p>
             <a:r>
-              <a:rPr lang="en-US" altLang="zh-TW" smtClean="0"/>
+              <a:rPr lang="en-US" altLang="zh-TW"/>
               <a:t>Click to edit Master title style</a:t>
             </a:r>
             <a:endParaRPr lang="zh-TW" altLang="en-US"/>
@@ -272,7 +277,7 @@
           </a:lstStyle>
           <a:p>
             <a:r>
-              <a:rPr lang="en-US" altLang="zh-TW" smtClean="0"/>
+              <a:rPr lang="en-US" altLang="zh-TW"/>
               <a:t>Click to edit Master subtitle style</a:t>
             </a:r>
             <a:endParaRPr lang="zh-TW" altLang="en-US"/>
@@ -296,7 +301,7 @@
           <a:p>
             <a:fld id="{24CCDC63-C2EC-4903-A216-5EA2C93289C7}" type="datetimeFigureOut">
               <a:rPr lang="vi-VN" smtClean="0"/>
-              <a:t>30/06/2022</a:t>
+              <a:t>08/06/2024</a:t>
             </a:fld>
             <a:endParaRPr lang="vi-VN"/>
           </a:p>
@@ -390,7 +395,7 @@
           <a:lstStyle/>
           <a:p>
             <a:r>
-              <a:rPr lang="en-US" altLang="zh-TW" smtClean="0"/>
+              <a:rPr lang="en-US" altLang="zh-TW"/>
               <a:t>Click to edit Master title style</a:t>
             </a:r>
             <a:endParaRPr lang="zh-TW" altLang="en-US"/>
@@ -414,35 +419,35 @@
           <a:p>
             <a:pPr lvl="0"/>
             <a:r>
-              <a:rPr lang="en-US" altLang="zh-TW" smtClean="0"/>
+              <a:rPr lang="en-US" altLang="zh-TW"/>
               <a:t>Edit Master text styles</a:t>
             </a:r>
           </a:p>
           <a:p>
             <a:pPr lvl="1"/>
             <a:r>
-              <a:rPr lang="en-US" altLang="zh-TW" smtClean="0"/>
+              <a:rPr lang="en-US" altLang="zh-TW"/>
               <a:t>Second level</a:t>
             </a:r>
           </a:p>
           <a:p>
             <a:pPr lvl="2"/>
             <a:r>
-              <a:rPr lang="en-US" altLang="zh-TW" smtClean="0"/>
+              <a:rPr lang="en-US" altLang="zh-TW"/>
               <a:t>Third level</a:t>
             </a:r>
           </a:p>
           <a:p>
             <a:pPr lvl="3"/>
             <a:r>
-              <a:rPr lang="en-US" altLang="zh-TW" smtClean="0"/>
+              <a:rPr lang="en-US" altLang="zh-TW"/>
               <a:t>Fourth level</a:t>
             </a:r>
           </a:p>
           <a:p>
             <a:pPr lvl="4"/>
             <a:r>
-              <a:rPr lang="en-US" altLang="zh-TW" smtClean="0"/>
+              <a:rPr lang="en-US" altLang="zh-TW"/>
               <a:t>Fifth level</a:t>
             </a:r>
             <a:endParaRPr lang="zh-TW" altLang="en-US"/>
@@ -466,7 +471,7 @@
           <a:p>
             <a:fld id="{24CCDC63-C2EC-4903-A216-5EA2C93289C7}" type="datetimeFigureOut">
               <a:rPr lang="vi-VN" smtClean="0"/>
-              <a:t>30/06/2022</a:t>
+              <a:t>08/06/2024</a:t>
             </a:fld>
             <a:endParaRPr lang="vi-VN"/>
           </a:p>
@@ -565,7 +570,7 @@
           <a:lstStyle/>
           <a:p>
             <a:r>
-              <a:rPr lang="en-US" altLang="zh-TW" smtClean="0"/>
+              <a:rPr lang="en-US" altLang="zh-TW"/>
               <a:t>Click to edit Master title style</a:t>
             </a:r>
             <a:endParaRPr lang="zh-TW" altLang="en-US"/>
@@ -594,35 +599,35 @@
           <a:p>
             <a:pPr lvl="0"/>
             <a:r>
-              <a:rPr lang="en-US" altLang="zh-TW" smtClean="0"/>
+              <a:rPr lang="en-US" altLang="zh-TW"/>
               <a:t>Edit Master text styles</a:t>
             </a:r>
           </a:p>
           <a:p>
             <a:pPr lvl="1"/>
             <a:r>
-              <a:rPr lang="en-US" altLang="zh-TW" smtClean="0"/>
+              <a:rPr lang="en-US" altLang="zh-TW"/>
               <a:t>Second level</a:t>
             </a:r>
           </a:p>
           <a:p>
             <a:pPr lvl="2"/>
             <a:r>
-              <a:rPr lang="en-US" altLang="zh-TW" smtClean="0"/>
+              <a:rPr lang="en-US" altLang="zh-TW"/>
               <a:t>Third level</a:t>
             </a:r>
           </a:p>
           <a:p>
             <a:pPr lvl="3"/>
             <a:r>
-              <a:rPr lang="en-US" altLang="zh-TW" smtClean="0"/>
+              <a:rPr lang="en-US" altLang="zh-TW"/>
               <a:t>Fourth level</a:t>
             </a:r>
           </a:p>
           <a:p>
             <a:pPr lvl="4"/>
             <a:r>
-              <a:rPr lang="en-US" altLang="zh-TW" smtClean="0"/>
+              <a:rPr lang="en-US" altLang="zh-TW"/>
               <a:t>Fifth level</a:t>
             </a:r>
             <a:endParaRPr lang="zh-TW" altLang="en-US"/>
@@ -646,7 +651,7 @@
           <a:p>
             <a:fld id="{24CCDC63-C2EC-4903-A216-5EA2C93289C7}" type="datetimeFigureOut">
               <a:rPr lang="vi-VN" smtClean="0"/>
-              <a:t>30/06/2022</a:t>
+              <a:t>08/06/2024</a:t>
             </a:fld>
             <a:endParaRPr lang="vi-VN"/>
           </a:p>
@@ -740,7 +745,7 @@
           <a:lstStyle/>
           <a:p>
             <a:r>
-              <a:rPr lang="en-US" altLang="zh-TW" smtClean="0"/>
+              <a:rPr lang="en-US" altLang="zh-TW"/>
               <a:t>Click to edit Master title style</a:t>
             </a:r>
             <a:endParaRPr lang="zh-TW" altLang="en-US"/>
@@ -764,35 +769,35 @@
           <a:p>
             <a:pPr lvl="0"/>
             <a:r>
-              <a:rPr lang="en-US" altLang="zh-TW" smtClean="0"/>
+              <a:rPr lang="en-US" altLang="zh-TW"/>
               <a:t>Edit Master text styles</a:t>
             </a:r>
           </a:p>
           <a:p>
             <a:pPr lvl="1"/>
             <a:r>
-              <a:rPr lang="en-US" altLang="zh-TW" smtClean="0"/>
+              <a:rPr lang="en-US" altLang="zh-TW"/>
               <a:t>Second level</a:t>
             </a:r>
           </a:p>
           <a:p>
             <a:pPr lvl="2"/>
             <a:r>
-              <a:rPr lang="en-US" altLang="zh-TW" smtClean="0"/>
+              <a:rPr lang="en-US" altLang="zh-TW"/>
               <a:t>Third level</a:t>
             </a:r>
           </a:p>
           <a:p>
             <a:pPr lvl="3"/>
             <a:r>
-              <a:rPr lang="en-US" altLang="zh-TW" smtClean="0"/>
+              <a:rPr lang="en-US" altLang="zh-TW"/>
               <a:t>Fourth level</a:t>
             </a:r>
           </a:p>
           <a:p>
             <a:pPr lvl="4"/>
             <a:r>
-              <a:rPr lang="en-US" altLang="zh-TW" smtClean="0"/>
+              <a:rPr lang="en-US" altLang="zh-TW"/>
               <a:t>Fifth level</a:t>
             </a:r>
             <a:endParaRPr lang="zh-TW" altLang="en-US"/>
@@ -816,7 +821,7 @@
           <a:p>
             <a:fld id="{24CCDC63-C2EC-4903-A216-5EA2C93289C7}" type="datetimeFigureOut">
               <a:rPr lang="vi-VN" smtClean="0"/>
-              <a:t>30/06/2022</a:t>
+              <a:t>08/06/2024</a:t>
             </a:fld>
             <a:endParaRPr lang="vi-VN"/>
           </a:p>
@@ -919,7 +924,7 @@
           </a:lstStyle>
           <a:p>
             <a:r>
-              <a:rPr lang="en-US" altLang="zh-TW" smtClean="0"/>
+              <a:rPr lang="en-US" altLang="zh-TW"/>
               <a:t>Click to edit Master title style</a:t>
             </a:r>
             <a:endParaRPr lang="zh-TW" altLang="en-US"/>
@@ -1039,7 +1044,7 @@
           <a:p>
             <a:pPr lvl="0"/>
             <a:r>
-              <a:rPr lang="en-US" altLang="zh-TW" smtClean="0"/>
+              <a:rPr lang="en-US" altLang="zh-TW"/>
               <a:t>Edit Master text styles</a:t>
             </a:r>
           </a:p>
@@ -1062,7 +1067,7 @@
           <a:p>
             <a:fld id="{24CCDC63-C2EC-4903-A216-5EA2C93289C7}" type="datetimeFigureOut">
               <a:rPr lang="vi-VN" smtClean="0"/>
-              <a:t>30/06/2022</a:t>
+              <a:t>08/06/2024</a:t>
             </a:fld>
             <a:endParaRPr lang="vi-VN"/>
           </a:p>
@@ -1156,7 +1161,7 @@
           <a:lstStyle/>
           <a:p>
             <a:r>
-              <a:rPr lang="en-US" altLang="zh-TW" smtClean="0"/>
+              <a:rPr lang="en-US" altLang="zh-TW"/>
               <a:t>Click to edit Master title style</a:t>
             </a:r>
             <a:endParaRPr lang="zh-TW" altLang="en-US"/>
@@ -1213,35 +1218,35 @@
           <a:p>
             <a:pPr lvl="0"/>
             <a:r>
-              <a:rPr lang="en-US" altLang="zh-TW" smtClean="0"/>
+              <a:rPr lang="en-US" altLang="zh-TW"/>
               <a:t>Edit Master text styles</a:t>
             </a:r>
           </a:p>
           <a:p>
             <a:pPr lvl="1"/>
             <a:r>
-              <a:rPr lang="en-US" altLang="zh-TW" smtClean="0"/>
+              <a:rPr lang="en-US" altLang="zh-TW"/>
               <a:t>Second level</a:t>
             </a:r>
           </a:p>
           <a:p>
             <a:pPr lvl="2"/>
             <a:r>
-              <a:rPr lang="en-US" altLang="zh-TW" smtClean="0"/>
+              <a:rPr lang="en-US" altLang="zh-TW"/>
               <a:t>Third level</a:t>
             </a:r>
           </a:p>
           <a:p>
             <a:pPr lvl="3"/>
             <a:r>
-              <a:rPr lang="en-US" altLang="zh-TW" smtClean="0"/>
+              <a:rPr lang="en-US" altLang="zh-TW"/>
               <a:t>Fourth level</a:t>
             </a:r>
           </a:p>
           <a:p>
             <a:pPr lvl="4"/>
             <a:r>
-              <a:rPr lang="en-US" altLang="zh-TW" smtClean="0"/>
+              <a:rPr lang="en-US" altLang="zh-TW"/>
               <a:t>Fifth level</a:t>
             </a:r>
             <a:endParaRPr lang="zh-TW" altLang="en-US"/>
@@ -1298,35 +1303,35 @@
           <a:p>
             <a:pPr lvl="0"/>
             <a:r>
-              <a:rPr lang="en-US" altLang="zh-TW" smtClean="0"/>
+              <a:rPr lang="en-US" altLang="zh-TW"/>
               <a:t>Edit Master text styles</a:t>
             </a:r>
           </a:p>
           <a:p>
             <a:pPr lvl="1"/>
             <a:r>
-              <a:rPr lang="en-US" altLang="zh-TW" smtClean="0"/>
+              <a:rPr lang="en-US" altLang="zh-TW"/>
               <a:t>Second level</a:t>
             </a:r>
           </a:p>
           <a:p>
             <a:pPr lvl="2"/>
             <a:r>
-              <a:rPr lang="en-US" altLang="zh-TW" smtClean="0"/>
+              <a:rPr lang="en-US" altLang="zh-TW"/>
               <a:t>Third level</a:t>
             </a:r>
           </a:p>
           <a:p>
             <a:pPr lvl="3"/>
             <a:r>
-              <a:rPr lang="en-US" altLang="zh-TW" smtClean="0"/>
+              <a:rPr lang="en-US" altLang="zh-TW"/>
               <a:t>Fourth level</a:t>
             </a:r>
           </a:p>
           <a:p>
             <a:pPr lvl="4"/>
             <a:r>
-              <a:rPr lang="en-US" altLang="zh-TW" smtClean="0"/>
+              <a:rPr lang="en-US" altLang="zh-TW"/>
               <a:t>Fifth level</a:t>
             </a:r>
             <a:endParaRPr lang="zh-TW" altLang="en-US"/>
@@ -1350,7 +1355,7 @@
           <a:p>
             <a:fld id="{24CCDC63-C2EC-4903-A216-5EA2C93289C7}" type="datetimeFigureOut">
               <a:rPr lang="vi-VN" smtClean="0"/>
-              <a:t>30/06/2022</a:t>
+              <a:t>08/06/2024</a:t>
             </a:fld>
             <a:endParaRPr lang="vi-VN"/>
           </a:p>
@@ -1448,7 +1453,7 @@
           </a:lstStyle>
           <a:p>
             <a:r>
-              <a:rPr lang="en-US" altLang="zh-TW" smtClean="0"/>
+              <a:rPr lang="en-US" altLang="zh-TW"/>
               <a:t>Click to edit Master title style</a:t>
             </a:r>
             <a:endParaRPr lang="zh-TW" altLang="en-US"/>
@@ -1514,7 +1519,7 @@
           <a:p>
             <a:pPr lvl="0"/>
             <a:r>
-              <a:rPr lang="en-US" altLang="zh-TW" smtClean="0"/>
+              <a:rPr lang="en-US" altLang="zh-TW"/>
               <a:t>Edit Master text styles</a:t>
             </a:r>
           </a:p>
@@ -1570,35 +1575,35 @@
           <a:p>
             <a:pPr lvl="0"/>
             <a:r>
-              <a:rPr lang="en-US" altLang="zh-TW" smtClean="0"/>
+              <a:rPr lang="en-US" altLang="zh-TW"/>
               <a:t>Edit Master text styles</a:t>
             </a:r>
           </a:p>
           <a:p>
             <a:pPr lvl="1"/>
             <a:r>
-              <a:rPr lang="en-US" altLang="zh-TW" smtClean="0"/>
+              <a:rPr lang="en-US" altLang="zh-TW"/>
               <a:t>Second level</a:t>
             </a:r>
           </a:p>
           <a:p>
             <a:pPr lvl="2"/>
             <a:r>
-              <a:rPr lang="en-US" altLang="zh-TW" smtClean="0"/>
+              <a:rPr lang="en-US" altLang="zh-TW"/>
               <a:t>Third level</a:t>
             </a:r>
           </a:p>
           <a:p>
             <a:pPr lvl="3"/>
             <a:r>
-              <a:rPr lang="en-US" altLang="zh-TW" smtClean="0"/>
+              <a:rPr lang="en-US" altLang="zh-TW"/>
               <a:t>Fourth level</a:t>
             </a:r>
           </a:p>
           <a:p>
             <a:pPr lvl="4"/>
             <a:r>
-              <a:rPr lang="en-US" altLang="zh-TW" smtClean="0"/>
+              <a:rPr lang="en-US" altLang="zh-TW"/>
               <a:t>Fifth level</a:t>
             </a:r>
             <a:endParaRPr lang="zh-TW" altLang="en-US"/>
@@ -1664,7 +1669,7 @@
           <a:p>
             <a:pPr lvl="0"/>
             <a:r>
-              <a:rPr lang="en-US" altLang="zh-TW" smtClean="0"/>
+              <a:rPr lang="en-US" altLang="zh-TW"/>
               <a:t>Edit Master text styles</a:t>
             </a:r>
           </a:p>
@@ -1720,35 +1725,35 @@
           <a:p>
             <a:pPr lvl="0"/>
             <a:r>
-              <a:rPr lang="en-US" altLang="zh-TW" smtClean="0"/>
+              <a:rPr lang="en-US" altLang="zh-TW"/>
               <a:t>Edit Master text styles</a:t>
             </a:r>
           </a:p>
           <a:p>
             <a:pPr lvl="1"/>
             <a:r>
-              <a:rPr lang="en-US" altLang="zh-TW" smtClean="0"/>
+              <a:rPr lang="en-US" altLang="zh-TW"/>
               <a:t>Second level</a:t>
             </a:r>
           </a:p>
           <a:p>
             <a:pPr lvl="2"/>
             <a:r>
-              <a:rPr lang="en-US" altLang="zh-TW" smtClean="0"/>
+              <a:rPr lang="en-US" altLang="zh-TW"/>
               <a:t>Third level</a:t>
             </a:r>
           </a:p>
           <a:p>
             <a:pPr lvl="3"/>
             <a:r>
-              <a:rPr lang="en-US" altLang="zh-TW" smtClean="0"/>
+              <a:rPr lang="en-US" altLang="zh-TW"/>
               <a:t>Fourth level</a:t>
             </a:r>
           </a:p>
           <a:p>
             <a:pPr lvl="4"/>
             <a:r>
-              <a:rPr lang="en-US" altLang="zh-TW" smtClean="0"/>
+              <a:rPr lang="en-US" altLang="zh-TW"/>
               <a:t>Fifth level</a:t>
             </a:r>
             <a:endParaRPr lang="zh-TW" altLang="en-US"/>
@@ -1772,7 +1777,7 @@
           <a:p>
             <a:fld id="{24CCDC63-C2EC-4903-A216-5EA2C93289C7}" type="datetimeFigureOut">
               <a:rPr lang="vi-VN" smtClean="0"/>
-              <a:t>30/06/2022</a:t>
+              <a:t>08/06/2024</a:t>
             </a:fld>
             <a:endParaRPr lang="vi-VN"/>
           </a:p>
@@ -1866,7 +1871,7 @@
           <a:lstStyle/>
           <a:p>
             <a:r>
-              <a:rPr lang="en-US" altLang="zh-TW" smtClean="0"/>
+              <a:rPr lang="en-US" altLang="zh-TW"/>
               <a:t>Click to edit Master title style</a:t>
             </a:r>
             <a:endParaRPr lang="zh-TW" altLang="en-US"/>
@@ -1890,7 +1895,7 @@
           <a:p>
             <a:fld id="{24CCDC63-C2EC-4903-A216-5EA2C93289C7}" type="datetimeFigureOut">
               <a:rPr lang="vi-VN" smtClean="0"/>
-              <a:t>30/06/2022</a:t>
+              <a:t>08/06/2024</a:t>
             </a:fld>
             <a:endParaRPr lang="vi-VN"/>
           </a:p>
@@ -1985,7 +1990,7 @@
           <a:p>
             <a:fld id="{24CCDC63-C2EC-4903-A216-5EA2C93289C7}" type="datetimeFigureOut">
               <a:rPr lang="vi-VN" smtClean="0"/>
-              <a:t>30/06/2022</a:t>
+              <a:t>08/06/2024</a:t>
             </a:fld>
             <a:endParaRPr lang="vi-VN"/>
           </a:p>
@@ -2088,7 +2093,7 @@
           </a:lstStyle>
           <a:p>
             <a:r>
-              <a:rPr lang="en-US" altLang="zh-TW" smtClean="0"/>
+              <a:rPr lang="en-US" altLang="zh-TW"/>
               <a:t>Click to edit Master title style</a:t>
             </a:r>
             <a:endParaRPr lang="zh-TW" altLang="en-US"/>
@@ -2145,35 +2150,35 @@
           <a:p>
             <a:pPr lvl="0"/>
             <a:r>
-              <a:rPr lang="en-US" altLang="zh-TW" smtClean="0"/>
+              <a:rPr lang="en-US" altLang="zh-TW"/>
               <a:t>Edit Master text styles</a:t>
             </a:r>
           </a:p>
           <a:p>
             <a:pPr lvl="1"/>
             <a:r>
-              <a:rPr lang="en-US" altLang="zh-TW" smtClean="0"/>
+              <a:rPr lang="en-US" altLang="zh-TW"/>
               <a:t>Second level</a:t>
             </a:r>
           </a:p>
           <a:p>
             <a:pPr lvl="2"/>
             <a:r>
-              <a:rPr lang="en-US" altLang="zh-TW" smtClean="0"/>
+              <a:rPr lang="en-US" altLang="zh-TW"/>
               <a:t>Third level</a:t>
             </a:r>
           </a:p>
           <a:p>
             <a:pPr lvl="3"/>
             <a:r>
-              <a:rPr lang="en-US" altLang="zh-TW" smtClean="0"/>
+              <a:rPr lang="en-US" altLang="zh-TW"/>
               <a:t>Fourth level</a:t>
             </a:r>
           </a:p>
           <a:p>
             <a:pPr lvl="4"/>
             <a:r>
-              <a:rPr lang="en-US" altLang="zh-TW" smtClean="0"/>
+              <a:rPr lang="en-US" altLang="zh-TW"/>
               <a:t>Fifth level</a:t>
             </a:r>
             <a:endParaRPr lang="zh-TW" altLang="en-US"/>
@@ -2239,7 +2244,7 @@
           <a:p>
             <a:pPr lvl="0"/>
             <a:r>
-              <a:rPr lang="en-US" altLang="zh-TW" smtClean="0"/>
+              <a:rPr lang="en-US" altLang="zh-TW"/>
               <a:t>Edit Master text styles</a:t>
             </a:r>
           </a:p>
@@ -2262,7 +2267,7 @@
           <a:p>
             <a:fld id="{24CCDC63-C2EC-4903-A216-5EA2C93289C7}" type="datetimeFigureOut">
               <a:rPr lang="vi-VN" smtClean="0"/>
-              <a:t>30/06/2022</a:t>
+              <a:t>08/06/2024</a:t>
             </a:fld>
             <a:endParaRPr lang="vi-VN"/>
           </a:p>
@@ -2365,7 +2370,7 @@
           </a:lstStyle>
           <a:p>
             <a:r>
-              <a:rPr lang="en-US" altLang="zh-TW" smtClean="0"/>
+              <a:rPr lang="en-US" altLang="zh-TW"/>
               <a:t>Click to edit Master title style</a:t>
             </a:r>
             <a:endParaRPr lang="zh-TW" altLang="en-US"/>
@@ -2430,7 +2435,7 @@
           </a:lstStyle>
           <a:p>
             <a:r>
-              <a:rPr lang="en-US" altLang="zh-TW" smtClean="0"/>
+              <a:rPr lang="en-US" altLang="zh-TW"/>
               <a:t>Click icon to add picture</a:t>
             </a:r>
             <a:endParaRPr lang="zh-TW" altLang="en-US"/>
@@ -2496,7 +2501,7 @@
           <a:p>
             <a:pPr lvl="0"/>
             <a:r>
-              <a:rPr lang="en-US" altLang="zh-TW" smtClean="0"/>
+              <a:rPr lang="en-US" altLang="zh-TW"/>
               <a:t>Edit Master text styles</a:t>
             </a:r>
           </a:p>
@@ -2519,7 +2524,7 @@
           <a:p>
             <a:fld id="{24CCDC63-C2EC-4903-A216-5EA2C93289C7}" type="datetimeFigureOut">
               <a:rPr lang="vi-VN" smtClean="0"/>
-              <a:t>30/06/2022</a:t>
+              <a:t>08/06/2024</a:t>
             </a:fld>
             <a:endParaRPr lang="vi-VN"/>
           </a:p>
@@ -2633,10 +2638,9 @@
           <a:lstStyle/>
           <a:p>
             <a:r>
-              <a:rPr lang="zh-TW" altLang="en-US" smtClean="0"/>
+              <a:rPr lang="zh-TW" altLang="en-US"/>
               <a:t>按一下以編輯母片標題樣式</a:t>
             </a:r>
-            <a:endParaRPr lang="zh-TW" altLang="en-US"/>
           </a:p>
         </p:txBody>
       </p:sp>
@@ -2667,38 +2671,37 @@
           <a:p>
             <a:pPr lvl="0"/>
             <a:r>
-              <a:rPr lang="zh-TW" altLang="en-US" smtClean="0"/>
+              <a:rPr lang="zh-TW" altLang="en-US"/>
               <a:t>按一下以編輯母片文字樣式</a:t>
             </a:r>
           </a:p>
           <a:p>
             <a:pPr lvl="1"/>
             <a:r>
-              <a:rPr lang="zh-TW" altLang="en-US" smtClean="0"/>
+              <a:rPr lang="zh-TW" altLang="en-US"/>
               <a:t>第二層</a:t>
             </a:r>
           </a:p>
           <a:p>
             <a:pPr lvl="2"/>
             <a:r>
-              <a:rPr lang="zh-TW" altLang="en-US" smtClean="0"/>
+              <a:rPr lang="zh-TW" altLang="en-US"/>
               <a:t>第三層</a:t>
             </a:r>
           </a:p>
           <a:p>
             <a:pPr lvl="3"/>
             <a:r>
-              <a:rPr lang="zh-TW" altLang="en-US" smtClean="0"/>
+              <a:rPr lang="zh-TW" altLang="en-US"/>
               <a:t>第四層</a:t>
             </a:r>
           </a:p>
           <a:p>
             <a:pPr lvl="4"/>
             <a:r>
-              <a:rPr lang="zh-TW" altLang="en-US" smtClean="0"/>
+              <a:rPr lang="zh-TW" altLang="en-US"/>
               <a:t>第五層</a:t>
             </a:r>
-            <a:endParaRPr lang="zh-TW" altLang="en-US"/>
           </a:p>
         </p:txBody>
       </p:sp>
@@ -2737,7 +2740,7 @@
           <a:p>
             <a:fld id="{24CCDC63-C2EC-4903-A216-5EA2C93289C7}" type="datetimeFigureOut">
               <a:rPr lang="vi-VN" smtClean="0"/>
-              <a:t>30/06/2022</a:t>
+              <a:t>08/06/2024</a:t>
             </a:fld>
             <a:endParaRPr lang="vi-VN"/>
           </a:p>
@@ -3135,7 +3138,7 @@
           <a:lstStyle/>
           <a:p>
             <a:r>
-              <a:rPr lang="zh-CN" altLang="en-US" sz="7200" b="1" i="1" dirty="0" smtClean="0">
+              <a:rPr lang="zh-CN" altLang="en-US" sz="7200" b="1" i="1" dirty="0">
                 <a:solidFill>
                   <a:srgbClr val="660033"/>
                 </a:solidFill>
@@ -3149,24 +3152,7 @@
                 <a:latin typeface="微軟正黑體" pitchFamily="34" charset="-120"/>
                 <a:ea typeface="微軟正黑體" pitchFamily="34" charset="-120"/>
               </a:rPr>
-              <a:t>愛</a:t>
-            </a:r>
-            <a:r>
-              <a:rPr lang="zh-CN" altLang="en-US" sz="7200" b="1" i="1" dirty="0">
-                <a:solidFill>
-                  <a:srgbClr val="660033"/>
-                </a:solidFill>
-                <a:effectLst>
-                  <a:outerShdw blurRad="38100" dist="38100" dir="2700000" algn="tl">
-                    <a:srgbClr val="000000">
-                      <a:alpha val="43137"/>
-                    </a:srgbClr>
-                  </a:outerShdw>
-                </a:effectLst>
-                <a:latin typeface="微軟正黑體" pitchFamily="34" charset="-120"/>
-                <a:ea typeface="微軟正黑體" pitchFamily="34" charset="-120"/>
-              </a:rPr>
-              <a:t>是</a:t>
+              <a:t>愛是</a:t>
             </a:r>
           </a:p>
         </p:txBody>
@@ -3227,34 +3213,14 @@
               <a:buNone/>
             </a:pPr>
             <a:r>
-              <a:rPr lang="zh-TW" altLang="en-US" sz="6400" b="1" dirty="0" smtClean="0">
+              <a:rPr lang="zh-TW" altLang="en-US" sz="6400" b="1" dirty="0">
                 <a:solidFill>
                   <a:srgbClr val="660033"/>
                 </a:solidFill>
                 <a:latin typeface="微軟正黑體" pitchFamily="34" charset="-120"/>
                 <a:ea typeface="微軟正黑體" pitchFamily="34" charset="-120"/>
               </a:rPr>
-              <a:t>愛</a:t>
-            </a:r>
-            <a:r>
-              <a:rPr lang="zh-TW" altLang="en-US" sz="6400" b="1" dirty="0">
-                <a:solidFill>
-                  <a:srgbClr val="660033"/>
-                </a:solidFill>
-                <a:latin typeface="微軟正黑體" pitchFamily="34" charset="-120"/>
-                <a:ea typeface="微軟正黑體" pitchFamily="34" charset="-120"/>
-              </a:rPr>
-              <a:t>是恆久忍</a:t>
-            </a:r>
-            <a:r>
-              <a:rPr lang="zh-TW" altLang="en-US" sz="6400" b="1" dirty="0">
-                <a:solidFill>
-                  <a:srgbClr val="660033"/>
-                </a:solidFill>
-                <a:latin typeface="微軟正黑體" pitchFamily="34" charset="-120"/>
-                <a:ea typeface="微軟正黑體" pitchFamily="34" charset="-120"/>
-              </a:rPr>
-              <a:t>耐</a:t>
+              <a:t>愛是恆久忍耐</a:t>
             </a:r>
             <a:endParaRPr lang="en-US" altLang="zh-TW" sz="6400" b="1" dirty="0">
               <a:solidFill>
@@ -3276,17 +3242,7 @@
                 <a:latin typeface="微軟正黑體" pitchFamily="34" charset="-120"/>
                 <a:ea typeface="微軟正黑體" pitchFamily="34" charset="-120"/>
               </a:rPr>
-              <a:t>愛</a:t>
-            </a:r>
-            <a:r>
-              <a:rPr lang="zh-TW" altLang="en-US" sz="6400" b="1" dirty="0">
-                <a:solidFill>
-                  <a:srgbClr val="660033"/>
-                </a:solidFill>
-                <a:latin typeface="微軟正黑體" pitchFamily="34" charset="-120"/>
-                <a:ea typeface="微軟正黑體" pitchFamily="34" charset="-120"/>
-              </a:rPr>
-              <a:t>是又有恩慈</a:t>
+              <a:t>愛是又有恩慈</a:t>
             </a:r>
             <a:endParaRPr lang="en-US" altLang="zh-TW" sz="6400" b="1" dirty="0">
               <a:solidFill>
@@ -3339,7 +3295,7 @@
                 <a:latin typeface="Microsoft JhengHei" panose="020B0604030504040204" pitchFamily="34" charset="-120"/>
                 <a:ea typeface="Microsoft JhengHei" panose="020B0604030504040204" pitchFamily="34" charset="-120"/>
               </a:rPr>
-              <a:t>正</a:t>
+              <a:t>正歌</a:t>
             </a:r>
             <a:r>
               <a:rPr lang="en-US" sz="4267" b="1" dirty="0">
@@ -3423,17 +3379,7 @@
                 <a:latin typeface="微軟正黑體" pitchFamily="34" charset="-120"/>
                 <a:ea typeface="微軟正黑體" pitchFamily="34" charset="-120"/>
               </a:rPr>
-              <a:t>愛是不嫉妒不自誇不張</a:t>
-            </a:r>
-            <a:r>
-              <a:rPr lang="zh-TW" altLang="en-US" sz="6400" b="1" dirty="0">
-                <a:solidFill>
-                  <a:srgbClr val="660033"/>
-                </a:solidFill>
-                <a:latin typeface="微軟正黑體" pitchFamily="34" charset="-120"/>
-                <a:ea typeface="微軟正黑體" pitchFamily="34" charset="-120"/>
-              </a:rPr>
-              <a:t>狂</a:t>
+              <a:t>愛是不嫉妒不自誇不張狂</a:t>
             </a:r>
             <a:endParaRPr lang="en-US" altLang="zh-TW" sz="6400" b="1" dirty="0">
               <a:solidFill>
@@ -3455,17 +3401,7 @@
                 <a:latin typeface="微軟正黑體" pitchFamily="34" charset="-120"/>
                 <a:ea typeface="微軟正黑體" pitchFamily="34" charset="-120"/>
               </a:rPr>
-              <a:t>不</a:t>
-            </a:r>
-            <a:r>
-              <a:rPr lang="zh-TW" altLang="en-US" sz="6400" b="1" dirty="0">
-                <a:solidFill>
-                  <a:srgbClr val="660033"/>
-                </a:solidFill>
-                <a:latin typeface="微軟正黑體" pitchFamily="34" charset="-120"/>
-                <a:ea typeface="微軟正黑體" pitchFamily="34" charset="-120"/>
-              </a:rPr>
-              <a:t>做害羞的事 </a:t>
+              <a:t>不做害羞的事 </a:t>
             </a:r>
             <a:endParaRPr lang="en-US" altLang="zh-TW" sz="6400" b="1" dirty="0">
               <a:solidFill>
@@ -3518,7 +3454,7 @@
                 <a:latin typeface="Microsoft JhengHei" panose="020B0604030504040204" pitchFamily="34" charset="-120"/>
                 <a:ea typeface="Microsoft JhengHei" panose="020B0604030504040204" pitchFamily="34" charset="-120"/>
               </a:rPr>
-              <a:t>正</a:t>
+              <a:t>正歌</a:t>
             </a:r>
             <a:r>
               <a:rPr lang="en-US" sz="4267" b="1" dirty="0">
@@ -3602,17 +3538,7 @@
                 <a:latin typeface="微軟正黑體" pitchFamily="34" charset="-120"/>
                 <a:ea typeface="微軟正黑體" pitchFamily="34" charset="-120"/>
               </a:rPr>
-              <a:t>不求自己益</a:t>
-            </a:r>
-            <a:r>
-              <a:rPr lang="zh-TW" altLang="en-US" sz="6400" b="1" dirty="0">
-                <a:solidFill>
-                  <a:srgbClr val="660033"/>
-                </a:solidFill>
-                <a:latin typeface="微軟正黑體" pitchFamily="34" charset="-120"/>
-                <a:ea typeface="微軟正黑體" pitchFamily="34" charset="-120"/>
-              </a:rPr>
-              <a:t>處</a:t>
+              <a:t>不求自己益處</a:t>
             </a:r>
             <a:endParaRPr lang="en-US" altLang="zh-TW" sz="6400" b="1" dirty="0">
               <a:solidFill>
@@ -3634,17 +3560,7 @@
                 <a:latin typeface="微軟正黑體" pitchFamily="34" charset="-120"/>
                 <a:ea typeface="微軟正黑體" pitchFamily="34" charset="-120"/>
               </a:rPr>
-              <a:t>不</a:t>
-            </a:r>
-            <a:r>
-              <a:rPr lang="zh-TW" altLang="en-US" sz="6400" b="1" dirty="0">
-                <a:solidFill>
-                  <a:srgbClr val="660033"/>
-                </a:solidFill>
-                <a:latin typeface="微軟正黑體" pitchFamily="34" charset="-120"/>
-                <a:ea typeface="微軟正黑體" pitchFamily="34" charset="-120"/>
-              </a:rPr>
-              <a:t>輕易地發怒 </a:t>
+              <a:t>不輕易地發怒 </a:t>
             </a:r>
             <a:endParaRPr lang="en-US" altLang="zh-TW" sz="6400" b="1" dirty="0">
               <a:solidFill>
@@ -3697,7 +3613,7 @@
                 <a:latin typeface="Microsoft JhengHei" panose="020B0604030504040204" pitchFamily="34" charset="-120"/>
                 <a:ea typeface="Microsoft JhengHei" panose="020B0604030504040204" pitchFamily="34" charset="-120"/>
               </a:rPr>
-              <a:t>正</a:t>
+              <a:t>正歌</a:t>
             </a:r>
             <a:r>
               <a:rPr lang="en-US" sz="4267" b="1" dirty="0">
@@ -3781,17 +3697,7 @@
                 <a:latin typeface="微軟正黑體" pitchFamily="34" charset="-120"/>
                 <a:ea typeface="微軟正黑體" pitchFamily="34" charset="-120"/>
               </a:rPr>
-              <a:t>不計算人的惡不喜歡不</a:t>
-            </a:r>
-            <a:r>
-              <a:rPr lang="zh-TW" altLang="en-US" sz="6400" b="1" dirty="0">
-                <a:solidFill>
-                  <a:srgbClr val="660033"/>
-                </a:solidFill>
-                <a:latin typeface="微軟正黑體" pitchFamily="34" charset="-120"/>
-                <a:ea typeface="微軟正黑體" pitchFamily="34" charset="-120"/>
-              </a:rPr>
-              <a:t>義</a:t>
+              <a:t>不計算人的惡不喜歡不義</a:t>
             </a:r>
             <a:endParaRPr lang="en-US" altLang="zh-TW" sz="6400" b="1" dirty="0">
               <a:solidFill>
@@ -3813,17 +3719,7 @@
                 <a:latin typeface="微軟正黑體" pitchFamily="34" charset="-120"/>
                 <a:ea typeface="微軟正黑體" pitchFamily="34" charset="-120"/>
               </a:rPr>
-              <a:t>愛</a:t>
-            </a:r>
-            <a:r>
-              <a:rPr lang="zh-TW" altLang="en-US" sz="6400" b="1" dirty="0">
-                <a:solidFill>
-                  <a:srgbClr val="660033"/>
-                </a:solidFill>
-                <a:latin typeface="微軟正黑體" pitchFamily="34" charset="-120"/>
-                <a:ea typeface="微軟正黑體" pitchFamily="34" charset="-120"/>
-              </a:rPr>
-              <a:t>只喜歡真理</a:t>
+              <a:t>愛只喜歡真理</a:t>
             </a:r>
             <a:endParaRPr lang="en-US" altLang="zh-TW" sz="6400" b="1" dirty="0">
               <a:solidFill>
@@ -3876,7 +3772,7 @@
                 <a:latin typeface="Microsoft JhengHei" panose="020B0604030504040204" pitchFamily="34" charset="-120"/>
                 <a:ea typeface="Microsoft JhengHei" panose="020B0604030504040204" pitchFamily="34" charset="-120"/>
               </a:rPr>
-              <a:t>正</a:t>
+              <a:t>正歌</a:t>
             </a:r>
             <a:r>
               <a:rPr lang="en-US" sz="4267" b="1" dirty="0">
@@ -3960,37 +3856,7 @@
                 <a:latin typeface="微軟正黑體" pitchFamily="34" charset="-120"/>
                 <a:ea typeface="微軟正黑體" pitchFamily="34" charset="-120"/>
               </a:rPr>
-              <a:t>凡事包容 </a:t>
-            </a:r>
-            <a:r>
-              <a:rPr lang="zh-TW" altLang="en-US" sz="6400" b="1" dirty="0">
-                <a:solidFill>
-                  <a:srgbClr val="660033"/>
-                </a:solidFill>
-                <a:latin typeface="微軟正黑體" pitchFamily="34" charset="-120"/>
-                <a:ea typeface="微軟正黑體" pitchFamily="34" charset="-120"/>
-              </a:rPr>
-              <a:t> 凡</a:t>
-            </a:r>
-            <a:r>
-              <a:rPr lang="zh-TW" altLang="en-US" sz="6400" b="1" dirty="0">
-                <a:solidFill>
-                  <a:srgbClr val="660033"/>
-                </a:solidFill>
-                <a:latin typeface="微軟正黑體" pitchFamily="34" charset="-120"/>
-                <a:ea typeface="微軟正黑體" pitchFamily="34" charset="-120"/>
-              </a:rPr>
-              <a:t>事相</a:t>
-            </a:r>
-            <a:r>
-              <a:rPr lang="zh-TW" altLang="en-US" sz="6400" b="1" dirty="0">
-                <a:solidFill>
-                  <a:srgbClr val="660033"/>
-                </a:solidFill>
-                <a:latin typeface="微軟正黑體" pitchFamily="34" charset="-120"/>
-                <a:ea typeface="微軟正黑體" pitchFamily="34" charset="-120"/>
-              </a:rPr>
-              <a:t>信</a:t>
+              <a:t>凡事包容  凡事相信</a:t>
             </a:r>
             <a:endParaRPr lang="en-US" altLang="zh-TW" sz="6400" b="1" dirty="0">
               <a:solidFill>
@@ -4012,27 +3878,7 @@
                 <a:latin typeface="微軟正黑體" pitchFamily="34" charset="-120"/>
                 <a:ea typeface="微軟正黑體" pitchFamily="34" charset="-120"/>
               </a:rPr>
-              <a:t>凡</a:t>
-            </a:r>
-            <a:r>
-              <a:rPr lang="zh-TW" altLang="en-US" sz="6400" b="1" dirty="0">
-                <a:solidFill>
-                  <a:srgbClr val="660033"/>
-                </a:solidFill>
-                <a:latin typeface="微軟正黑體" pitchFamily="34" charset="-120"/>
-                <a:ea typeface="微軟正黑體" pitchFamily="34" charset="-120"/>
-              </a:rPr>
-              <a:t>事盼望凡事忍</a:t>
-            </a:r>
-            <a:r>
-              <a:rPr lang="zh-TW" altLang="en-US" sz="6400" b="1" dirty="0" smtClean="0">
-                <a:solidFill>
-                  <a:srgbClr val="660033"/>
-                </a:solidFill>
-                <a:latin typeface="微軟正黑體" pitchFamily="34" charset="-120"/>
-                <a:ea typeface="微軟正黑體" pitchFamily="34" charset="-120"/>
-              </a:rPr>
-              <a:t>耐</a:t>
+              <a:t>凡事盼望凡事忍耐</a:t>
             </a:r>
             <a:endParaRPr lang="en-US" altLang="zh-TW" sz="6400" b="1" dirty="0">
               <a:solidFill>
@@ -4078,34 +3924,24 @@
               <a:t>( </a:t>
             </a:r>
             <a:r>
-              <a:rPr lang="zh-CN" altLang="en-US" sz="4267" b="1" dirty="0" smtClean="0">
+              <a:rPr lang="zh-CN" altLang="en-US" sz="4267" b="1" dirty="0">
                 <a:solidFill>
                   <a:srgbClr val="660033"/>
                 </a:solidFill>
                 <a:latin typeface="Microsoft JhengHei" panose="020B0604030504040204" pitchFamily="34" charset="-120"/>
                 <a:ea typeface="Microsoft JhengHei" panose="020B0604030504040204" pitchFamily="34" charset="-120"/>
               </a:rPr>
-              <a:t>副</a:t>
-            </a:r>
-            <a:r>
-              <a:rPr lang="en-US" sz="4267" b="1" dirty="0" smtClean="0">
+              <a:t>副歌</a:t>
+            </a:r>
+            <a:r>
+              <a:rPr lang="en-US" sz="4267" b="1" dirty="0">
                 <a:solidFill>
                   <a:srgbClr val="660033"/>
                 </a:solidFill>
                 <a:latin typeface="Microsoft JhengHei" panose="020B0604030504040204" pitchFamily="34" charset="-120"/>
                 <a:ea typeface="Microsoft JhengHei" panose="020B0604030504040204" pitchFamily="34" charset="-120"/>
               </a:rPr>
-              <a:t> </a:t>
-            </a:r>
-            <a:r>
-              <a:rPr lang="en-US" sz="4267" b="1" dirty="0">
-                <a:solidFill>
-                  <a:srgbClr val="660033"/>
-                </a:solidFill>
-                <a:latin typeface="Microsoft JhengHei" panose="020B0604030504040204" pitchFamily="34" charset="-120"/>
-                <a:ea typeface="Microsoft JhengHei" panose="020B0604030504040204" pitchFamily="34" charset="-120"/>
-              </a:rPr>
-              <a:t>)</a:t>
+              <a:t> )</a:t>
             </a:r>
             <a:endParaRPr lang="vi-VN" sz="4267" b="1" dirty="0">
               <a:solidFill>
@@ -4172,24 +4008,14 @@
               <a:buNone/>
             </a:pPr>
             <a:r>
-              <a:rPr lang="zh-TW" altLang="en-US" sz="6400" b="1" dirty="0" smtClean="0">
+              <a:rPr lang="zh-TW" altLang="en-US" sz="6400" b="1" dirty="0">
                 <a:solidFill>
                   <a:srgbClr val="660033"/>
                 </a:solidFill>
                 <a:latin typeface="微軟正黑體" pitchFamily="34" charset="-120"/>
                 <a:ea typeface="微軟正黑體" pitchFamily="34" charset="-120"/>
               </a:rPr>
-              <a:t>愛</a:t>
-            </a:r>
-            <a:r>
-              <a:rPr lang="zh-TW" altLang="en-US" sz="6400" b="1" dirty="0">
-                <a:solidFill>
-                  <a:srgbClr val="660033"/>
-                </a:solidFill>
-                <a:latin typeface="微軟正黑體" pitchFamily="34" charset="-120"/>
-                <a:ea typeface="微軟正黑體" pitchFamily="34" charset="-120"/>
-              </a:rPr>
-              <a:t>是永不止息</a:t>
+              <a:t>愛是永不止息</a:t>
             </a:r>
             <a:endParaRPr lang="en-US" altLang="zh-TW" sz="6400" b="1" dirty="0">
               <a:solidFill>
@@ -4235,34 +4061,24 @@
               <a:t>( </a:t>
             </a:r>
             <a:r>
-              <a:rPr lang="zh-CN" altLang="en-US" sz="4267" b="1" dirty="0" smtClean="0">
+              <a:rPr lang="zh-CN" altLang="en-US" sz="4267" b="1" dirty="0">
                 <a:solidFill>
                   <a:srgbClr val="660033"/>
                 </a:solidFill>
                 <a:latin typeface="Microsoft JhengHei" panose="020B0604030504040204" pitchFamily="34" charset="-120"/>
                 <a:ea typeface="Microsoft JhengHei" panose="020B0604030504040204" pitchFamily="34" charset="-120"/>
               </a:rPr>
-              <a:t>副</a:t>
-            </a:r>
-            <a:r>
-              <a:rPr lang="en-US" sz="4267" b="1" dirty="0" smtClean="0">
+              <a:t>副歌</a:t>
+            </a:r>
+            <a:r>
+              <a:rPr lang="en-US" sz="4267" b="1" dirty="0">
                 <a:solidFill>
                   <a:srgbClr val="660033"/>
                 </a:solidFill>
                 <a:latin typeface="Microsoft JhengHei" panose="020B0604030504040204" pitchFamily="34" charset="-120"/>
                 <a:ea typeface="Microsoft JhengHei" panose="020B0604030504040204" pitchFamily="34" charset="-120"/>
               </a:rPr>
-              <a:t> </a:t>
-            </a:r>
-            <a:r>
-              <a:rPr lang="en-US" sz="4267" b="1" dirty="0">
-                <a:solidFill>
-                  <a:srgbClr val="660033"/>
-                </a:solidFill>
-                <a:latin typeface="Microsoft JhengHei" panose="020B0604030504040204" pitchFamily="34" charset="-120"/>
-                <a:ea typeface="Microsoft JhengHei" panose="020B0604030504040204" pitchFamily="34" charset="-120"/>
-              </a:rPr>
-              <a:t>)</a:t>
+              <a:t> )</a:t>
             </a:r>
             <a:endParaRPr lang="vi-VN" sz="4267" b="1" dirty="0">
               <a:solidFill>
@@ -4336,37 +4152,7 @@
                 <a:latin typeface="微軟正黑體" pitchFamily="34" charset="-120"/>
                 <a:ea typeface="微軟正黑體" pitchFamily="34" charset="-120"/>
               </a:rPr>
-              <a:t>我要包容 </a:t>
-            </a:r>
-            <a:r>
-              <a:rPr lang="zh-CN" altLang="en-US" sz="6400" b="1" dirty="0">
-                <a:solidFill>
-                  <a:srgbClr val="660033"/>
-                </a:solidFill>
-                <a:latin typeface="微軟正黑體" pitchFamily="34" charset="-120"/>
-                <a:ea typeface="微軟正黑體" pitchFamily="34" charset="-120"/>
-              </a:rPr>
-              <a:t> 我</a:t>
-            </a:r>
-            <a:r>
-              <a:rPr lang="zh-CN" altLang="en-US" sz="6400" b="1" dirty="0">
-                <a:solidFill>
-                  <a:srgbClr val="660033"/>
-                </a:solidFill>
-                <a:latin typeface="微軟正黑體" pitchFamily="34" charset="-120"/>
-                <a:ea typeface="微軟正黑體" pitchFamily="34" charset="-120"/>
-              </a:rPr>
-              <a:t>要相</a:t>
-            </a:r>
-            <a:r>
-              <a:rPr lang="zh-CN" altLang="en-US" sz="6400" b="1" dirty="0">
-                <a:solidFill>
-                  <a:srgbClr val="660033"/>
-                </a:solidFill>
-                <a:latin typeface="微軟正黑體" pitchFamily="34" charset="-120"/>
-                <a:ea typeface="微軟正黑體" pitchFamily="34" charset="-120"/>
-              </a:rPr>
-              <a:t>信</a:t>
+              <a:t>我要包容  我要相信</a:t>
             </a:r>
             <a:endParaRPr lang="en-US" altLang="zh-CN" sz="6400" b="1" dirty="0">
               <a:solidFill>
@@ -4388,17 +4174,7 @@
                 <a:latin typeface="微軟正黑體" pitchFamily="34" charset="-120"/>
                 <a:ea typeface="微軟正黑體" pitchFamily="34" charset="-120"/>
               </a:rPr>
-              <a:t>我</a:t>
-            </a:r>
-            <a:r>
-              <a:rPr lang="zh-CN" altLang="en-US" sz="6400" b="1" dirty="0">
-                <a:solidFill>
-                  <a:srgbClr val="660033"/>
-                </a:solidFill>
-                <a:latin typeface="微軟正黑體" pitchFamily="34" charset="-120"/>
-                <a:ea typeface="微軟正黑體" pitchFamily="34" charset="-120"/>
-              </a:rPr>
-              <a:t>要盼望我要忍耐</a:t>
+              <a:t>我要盼望我要忍耐</a:t>
             </a:r>
             <a:endParaRPr lang="en-US" altLang="zh-TW" sz="6400" b="1" dirty="0">
               <a:solidFill>
@@ -4444,34 +4220,24 @@
               <a:t>( </a:t>
             </a:r>
             <a:r>
-              <a:rPr lang="zh-CN" altLang="en-US" sz="4267" b="1" dirty="0" smtClean="0">
+              <a:rPr lang="zh-CN" altLang="en-US" sz="4267" b="1" dirty="0">
                 <a:solidFill>
                   <a:srgbClr val="660033"/>
                 </a:solidFill>
                 <a:latin typeface="Microsoft JhengHei" panose="020B0604030504040204" pitchFamily="34" charset="-120"/>
                 <a:ea typeface="Microsoft JhengHei" panose="020B0604030504040204" pitchFamily="34" charset="-120"/>
               </a:rPr>
-              <a:t>副</a:t>
-            </a:r>
-            <a:r>
-              <a:rPr lang="en-US" sz="4267" b="1" dirty="0" smtClean="0">
+              <a:t>副歌</a:t>
+            </a:r>
+            <a:r>
+              <a:rPr lang="en-US" sz="4267" b="1" dirty="0">
                 <a:solidFill>
                   <a:srgbClr val="660033"/>
                 </a:solidFill>
                 <a:latin typeface="Microsoft JhengHei" panose="020B0604030504040204" pitchFamily="34" charset="-120"/>
                 <a:ea typeface="Microsoft JhengHei" panose="020B0604030504040204" pitchFamily="34" charset="-120"/>
               </a:rPr>
-              <a:t> </a:t>
-            </a:r>
-            <a:r>
-              <a:rPr lang="en-US" sz="4267" b="1" dirty="0">
-                <a:solidFill>
-                  <a:srgbClr val="660033"/>
-                </a:solidFill>
-                <a:latin typeface="Microsoft JhengHei" panose="020B0604030504040204" pitchFamily="34" charset="-120"/>
-                <a:ea typeface="Microsoft JhengHei" panose="020B0604030504040204" pitchFamily="34" charset="-120"/>
-              </a:rPr>
-              <a:t>)</a:t>
+              <a:t> )</a:t>
             </a:r>
             <a:endParaRPr lang="vi-VN" sz="4267" b="1" dirty="0">
               <a:solidFill>
@@ -4545,17 +4311,7 @@
                 <a:latin typeface="微軟正黑體" pitchFamily="34" charset="-120"/>
                 <a:ea typeface="微軟正黑體" pitchFamily="34" charset="-120"/>
               </a:rPr>
-              <a:t>敞開心愛人如</a:t>
-            </a:r>
-            <a:r>
-              <a:rPr lang="zh-TW" altLang="en-US" sz="6400" b="1" dirty="0">
-                <a:solidFill>
-                  <a:srgbClr val="660033"/>
-                </a:solidFill>
-                <a:latin typeface="微軟正黑體" pitchFamily="34" charset="-120"/>
-                <a:ea typeface="微軟正黑體" pitchFamily="34" charset="-120"/>
-              </a:rPr>
-              <a:t>己</a:t>
+              <a:t>敞開心愛人如己</a:t>
             </a:r>
             <a:endParaRPr lang="en-US" altLang="zh-TW" sz="6400" b="1" dirty="0">
               <a:solidFill>
@@ -4577,37 +4333,7 @@
                 <a:latin typeface="微軟正黑體" pitchFamily="34" charset="-120"/>
                 <a:ea typeface="微軟正黑體" pitchFamily="34" charset="-120"/>
               </a:rPr>
-              <a:t>我</a:t>
-            </a:r>
-            <a:r>
-              <a:rPr lang="zh-TW" altLang="en-US" sz="6400" b="1" dirty="0">
-                <a:solidFill>
-                  <a:srgbClr val="660033"/>
-                </a:solidFill>
-                <a:latin typeface="微軟正黑體" pitchFamily="34" charset="-120"/>
-                <a:ea typeface="微軟正黑體" pitchFamily="34" charset="-120"/>
-              </a:rPr>
-              <a:t>愛 </a:t>
-            </a:r>
-            <a:r>
-              <a:rPr lang="zh-TW" altLang="en-US" sz="6400" b="1" dirty="0">
-                <a:solidFill>
-                  <a:srgbClr val="660033"/>
-                </a:solidFill>
-                <a:latin typeface="微軟正黑體" pitchFamily="34" charset="-120"/>
-                <a:ea typeface="微軟正黑體" pitchFamily="34" charset="-120"/>
-              </a:rPr>
-              <a:t> 因</a:t>
-            </a:r>
-            <a:r>
-              <a:rPr lang="zh-TW" altLang="en-US" sz="6400" b="1" dirty="0">
-                <a:solidFill>
-                  <a:srgbClr val="660033"/>
-                </a:solidFill>
-                <a:latin typeface="微軟正黑體" pitchFamily="34" charset="-120"/>
-                <a:ea typeface="微軟正黑體" pitchFamily="34" charset="-120"/>
-              </a:rPr>
-              <a:t>天父先愛我</a:t>
+              <a:t>我愛  因天父先愛我</a:t>
             </a:r>
             <a:endParaRPr lang="en-US" altLang="zh-TW" sz="6400" b="1" dirty="0">
               <a:solidFill>
@@ -4653,34 +4379,24 @@
               <a:t>( </a:t>
             </a:r>
             <a:r>
-              <a:rPr lang="zh-CN" altLang="en-US" sz="4267" b="1" dirty="0" smtClean="0">
+              <a:rPr lang="zh-CN" altLang="en-US" sz="4267" b="1" dirty="0">
                 <a:solidFill>
                   <a:srgbClr val="660033"/>
                 </a:solidFill>
                 <a:latin typeface="Microsoft JhengHei" panose="020B0604030504040204" pitchFamily="34" charset="-120"/>
                 <a:ea typeface="Microsoft JhengHei" panose="020B0604030504040204" pitchFamily="34" charset="-120"/>
               </a:rPr>
-              <a:t>副</a:t>
-            </a:r>
-            <a:r>
-              <a:rPr lang="en-US" sz="4267" b="1" dirty="0" smtClean="0">
+              <a:t>副歌</a:t>
+            </a:r>
+            <a:r>
+              <a:rPr lang="en-US" sz="4267" b="1">
                 <a:solidFill>
                   <a:srgbClr val="660033"/>
                 </a:solidFill>
                 <a:latin typeface="Microsoft JhengHei" panose="020B0604030504040204" pitchFamily="34" charset="-120"/>
                 <a:ea typeface="Microsoft JhengHei" panose="020B0604030504040204" pitchFamily="34" charset="-120"/>
               </a:rPr>
-              <a:t> </a:t>
-            </a:r>
-            <a:r>
-              <a:rPr lang="en-US" sz="4267" b="1" dirty="0">
-                <a:solidFill>
-                  <a:srgbClr val="660033"/>
-                </a:solidFill>
-                <a:latin typeface="Microsoft JhengHei" panose="020B0604030504040204" pitchFamily="34" charset="-120"/>
-                <a:ea typeface="Microsoft JhengHei" panose="020B0604030504040204" pitchFamily="34" charset="-120"/>
-              </a:rPr>
-              <a:t>)</a:t>
+              <a:t> )</a:t>
             </a:r>
             <a:endParaRPr lang="vi-VN" sz="4267" b="1" dirty="0">
               <a:solidFill>
